--- a/健管45天英雄旅程分享-王執定.pptx
+++ b/健管45天英雄旅程分享-王執定.pptx
@@ -702,17 +702,27 @@
           <a:lstStyle/>
           <a:p>
             <a:r>
-              <a:t>【結尾謝幕｜預計 35 秒】</a:t>
-            </a:r>
-          </a:p>
-          <a:p>
-            <a:r>
-              <a:t>最後，我想用這句話做總結：</a:t>
-            </a:r>
-          </a:p>
-          <a:p>
-            <a:r>
-              <a:t>『45 天前，我以為我只是在減重；45 天後，我發現我贏回了人生的主控權。』</a:t>
+              <a:t>【結尾謝幕｜預計 40 秒】</a:t>
+            </a:r>
+          </a:p>
+          <a:p>
+            <a:r>
+              <a:t>最後，我想用我這 45 天刻在心底的一句話做總結：</a:t>
+            </a:r>
+          </a:p>
+          <a:p>
+            <a:r>
+              <a:t>『什麼事情都可以放下，唯獨不能放下筷子；什麼事情都可以失去，唯獨不能失去健康。』</a:t>
+            </a:r>
+          </a:p>
+          <a:p>
+            <a:r>
+              <a:t>健管不是叫我們放下筷子挨餓節食，而是教我們好好拿穩筷子、吃對每一口營養。</a:t>
+            </a:r>
+          </a:p>
+          <a:p>
+            <a:r>
+              <a:t>因為在這個世界上，任何忙碌都可以先放下，唯有這雙筷子下的健康，是我們一輩子絕對不能失去的底氣！</a:t>
             </a:r>
           </a:p>
           <a:p>
@@ -5203,9 +5213,9 @@
           <a:p>
             <a:pPr>
               <a:spcAft>
-                <a:spcPts val="1600"/>
+                <a:spcPts val="1400"/>
               </a:spcAft>
-              <a:defRPr sz="2200" b="1">
+              <a:defRPr sz="2000" b="1">
                 <a:solidFill>
                   <a:srgbClr val="059669"/>
                 </a:solidFill>
@@ -5219,29 +5229,45 @@
           <a:p>
             <a:pPr>
               <a:spcAft>
-                <a:spcPts val="2800"/>
+                <a:spcPts val="1800"/>
               </a:spcAft>
-              <a:defRPr sz="3600" b="1">
-                <a:solidFill>
-                  <a:srgbClr val="FFFFFF"/>
+              <a:defRPr sz="3200" b="1">
+                <a:solidFill>
+                  <a:srgbClr val="D97706"/>
                 </a:solidFill>
                 <a:latin typeface="Microsoft JhengHei"/>
               </a:defRPr>
             </a:pPr>
             <a:r>
-              <a:t>「45 天前，我以為我只是在管理體重；</a:t>
+              <a:t>「什麼事情都可以放下，唯獨不能放下筷子；</a:t>
             </a:r>
             <a:br/>
             <a:r>
-              <a:t> 45 天後，我發現我贏回了人生的主控權。」</a:t>
+              <a:t> 什麼事情都可以失去，唯獨不能失去健康。」</a:t>
             </a:r>
           </a:p>
           <a:p>
             <a:pPr>
               <a:spcAft>
-                <a:spcPts val="1200"/>
+                <a:spcPts val="2400"/>
               </a:spcAft>
-              <a:defRPr sz="1600">
+              <a:defRPr sz="2000">
+                <a:solidFill>
+                  <a:srgbClr val="FFFFFF"/>
+                </a:solidFill>
+                <a:latin typeface="Microsoft JhengHei"/>
+              </a:defRPr>
+            </a:pPr>
+            <a:r>
+              <a:t>45 天前，我以為我只是在管理體重；45 天後，我發現我贏回了人生的主控權。</a:t>
+            </a:r>
+          </a:p>
+          <a:p>
+            <a:pPr>
+              <a:spcAft>
+                <a:spcPts val="1000"/>
+              </a:spcAft>
+              <a:defRPr sz="1500">
                 <a:solidFill>
                   <a:srgbClr val="94A3B8"/>
                 </a:solidFill>
@@ -5254,9 +5280,9 @@
           </a:p>
           <a:p>
             <a:pPr>
-              <a:defRPr sz="2000" b="1">
-                <a:solidFill>
-                  <a:srgbClr val="D97706"/>
+              <a:defRPr sz="1800" b="1">
+                <a:solidFill>
+                  <a:srgbClr val="059669"/>
                 </a:solidFill>
                 <a:latin typeface="Microsoft JhengHei"/>
               </a:defRPr>
